--- a/Projeto de Software e Segurança da Informação - 2026/Projeto de Software/Aula08-Diagrama UML/Diagrama de Uso.pptx
+++ b/Projeto de Software e Segurança da Informação - 2026/Projeto de Software/Aula08-Diagrama UML/Diagrama de Uso.pptx
@@ -20839,10 +20839,10 @@
               <a:buNone/>
             </a:pPr>
             <a:r>
-              <a:rPr lang="pt-BR" sz="1600"/>
+              <a:rPr lang="pt-BR" sz="1600" dirty="0"/>
               <a:t>Uma lanchonete realiza o controle de pedidos de forma manual, utilizando papel e planilhas. Com o aumento da demanda, surgiram problemas como erros no cálculo dos pedidos, dificuldade no controle de status, falta de padronização dos produtos e limitações para o crescimento do negócio.</a:t>
             </a:r>
-            <a:endParaRPr/>
+            <a:endParaRPr dirty="0"/>
           </a:p>
           <a:p>
             <a:pPr marL="0" lvl="0" indent="0" algn="just" rtl="0">
@@ -20862,26 +20862,26 @@
               <a:buNone/>
             </a:pPr>
             <a:r>
-              <a:rPr lang="pt-BR" sz="1600"/>
+              <a:rPr lang="pt-BR" sz="1600" dirty="0"/>
               <a:t>Diante desse cenário, surge a necessidade de </a:t>
             </a:r>
             <a:r>
-              <a:rPr lang="pt-BR" sz="1600" b="1"/>
+              <a:rPr lang="pt-BR" sz="1600" b="1" dirty="0"/>
               <a:t>planejar e desenvolver um sistema informatizado de pedidos</a:t>
             </a:r>
             <a:r>
-              <a:rPr lang="pt-BR" sz="1600"/>
+              <a:rPr lang="pt-BR" sz="1600" dirty="0"/>
               <a:t>, iniciando com uma solução simples em Java e evoluindo para uma aplicação moderna baseada em </a:t>
             </a:r>
             <a:r>
-              <a:rPr lang="pt-BR" sz="1600" b="1"/>
+              <a:rPr lang="pt-BR" sz="1600" b="1" dirty="0"/>
               <a:t>APIs REST com Spring Boot</a:t>
             </a:r>
             <a:r>
-              <a:rPr lang="pt-BR" sz="1600"/>
+              <a:rPr lang="pt-BR" sz="1600" dirty="0"/>
               <a:t>.</a:t>
             </a:r>
-            <a:endParaRPr/>
+            <a:endParaRPr dirty="0"/>
           </a:p>
           <a:p>
             <a:pPr marL="0" lvl="0" indent="0" algn="just" rtl="0">
@@ -20900,7 +20900,7 @@
               <a:buSzPts val="2000"/>
               <a:buNone/>
             </a:pPr>
-            <a:endParaRPr/>
+            <a:endParaRPr dirty="0"/>
           </a:p>
         </p:txBody>
       </p:sp>
@@ -21029,10 +21029,10 @@
               <a:buNone/>
             </a:pPr>
             <a:r>
-              <a:rPr lang="pt-BR" sz="1600"/>
+              <a:rPr lang="pt-BR" sz="1600" dirty="0"/>
               <a:t>Os alunos deverão analisar o problema, identificar as necessidades do sistema e desenvolver uma solução computacional, passando por diferentes níveis de complexidade:</a:t>
             </a:r>
-            <a:endParaRPr/>
+            <a:endParaRPr dirty="0"/>
           </a:p>
           <a:p>
             <a:pPr marL="971550" lvl="1" indent="-285750" algn="just" rtl="0">
@@ -21052,10 +21052,10 @@
               <a:buChar char="•"/>
             </a:pPr>
             <a:r>
-              <a:rPr lang="pt-BR" sz="1400"/>
+              <a:rPr lang="pt-BR" sz="1400" dirty="0"/>
               <a:t>Da Lógica Estruturada ao Paradigma Orientado a Objetos</a:t>
             </a:r>
-            <a:endParaRPr/>
+            <a:endParaRPr dirty="0"/>
           </a:p>
           <a:p>
             <a:pPr marL="971550" lvl="1" indent="-285750" algn="just" rtl="0">
@@ -21075,10 +21075,10 @@
               <a:buChar char="•"/>
             </a:pPr>
             <a:r>
-              <a:rPr lang="pt-BR" sz="1400"/>
+              <a:rPr lang="pt-BR" sz="1400" dirty="0"/>
               <a:t>Da aplicação em Console à Arquitetura Web com Spring Boot</a:t>
             </a:r>
-            <a:endParaRPr/>
+            <a:endParaRPr dirty="0"/>
           </a:p>
           <a:p>
             <a:pPr marL="971550" lvl="1" indent="-285750" algn="just" rtl="0">
@@ -21098,10 +21098,10 @@
               <a:buChar char="•"/>
             </a:pPr>
             <a:r>
-              <a:rPr lang="pt-BR" sz="1400"/>
+              <a:rPr lang="pt-BR" sz="1400" dirty="0"/>
               <a:t>Modelagem com UML</a:t>
             </a:r>
-            <a:endParaRPr/>
+            <a:endParaRPr dirty="0"/>
           </a:p>
           <a:p>
             <a:pPr marL="0" lvl="0" indent="0" algn="just" rtl="0">
@@ -21121,10 +21121,10 @@
               <a:buNone/>
             </a:pPr>
             <a:r>
-              <a:rPr lang="pt-BR" sz="1600"/>
+              <a:rPr lang="pt-BR" sz="1600" dirty="0"/>
               <a:t>Antes de escrever código, será necessário modelar o sistema utilizando UML, garantindo organização, clareza e entendimento do domínio do problema.</a:t>
             </a:r>
-            <a:endParaRPr/>
+            <a:endParaRPr dirty="0"/>
           </a:p>
         </p:txBody>
       </p:sp>
@@ -21253,26 +21253,26 @@
               <a:buNone/>
             </a:pPr>
             <a:r>
-              <a:rPr lang="pt-BR" sz="1800"/>
+              <a:rPr lang="pt-BR" sz="1800" dirty="0"/>
               <a:t>O Diagrama de Casos de Uso representa as </a:t>
             </a:r>
             <a:r>
-              <a:rPr lang="pt-BR" sz="1800" b="1"/>
+              <a:rPr lang="pt-BR" sz="1800" b="1" dirty="0"/>
               <a:t>funcionalidades de um sistema do ponto de vista do usuário</a:t>
             </a:r>
             <a:r>
-              <a:rPr lang="pt-BR" sz="1800"/>
+              <a:rPr lang="pt-BR" sz="1800" dirty="0"/>
               <a:t>, mostrando </a:t>
             </a:r>
             <a:r>
-              <a:rPr lang="pt-BR" sz="1800" b="1"/>
+              <a:rPr lang="pt-BR" sz="1800" b="1" dirty="0"/>
               <a:t>o que o sistema faz</a:t>
             </a:r>
             <a:r>
-              <a:rPr lang="pt-BR" sz="1800"/>
+              <a:rPr lang="pt-BR" sz="1800" dirty="0"/>
               <a:t>, e não como ele é implementado.</a:t>
             </a:r>
-            <a:endParaRPr/>
+            <a:endParaRPr dirty="0"/>
           </a:p>
           <a:p>
             <a:pPr marL="0" lvl="0" indent="0" algn="just" rtl="0">
@@ -21292,21 +21292,21 @@
               <a:buNone/>
             </a:pPr>
             <a:br>
-              <a:rPr lang="pt-BR" sz="1800"/>
+              <a:rPr lang="pt-BR" sz="1800" dirty="0"/>
             </a:br>
             <a:r>
-              <a:rPr lang="pt-BR" sz="1800"/>
+              <a:rPr lang="pt-BR" sz="1800" dirty="0"/>
               <a:t>Ele apresenta, de forma clara e visual, </a:t>
             </a:r>
             <a:r>
-              <a:rPr lang="pt-BR" sz="1800" b="1"/>
+              <a:rPr lang="pt-BR" sz="1800" b="1" dirty="0"/>
               <a:t>quem interage com o sistema e quais ações podem ser realizadas</a:t>
             </a:r>
             <a:r>
-              <a:rPr lang="pt-BR" sz="1800"/>
+              <a:rPr lang="pt-BR" sz="1800" dirty="0"/>
               <a:t>, facilitando a compreensão do funcionamento geral do sistema.</a:t>
             </a:r>
-            <a:endParaRPr/>
+            <a:endParaRPr dirty="0"/>
           </a:p>
           <a:p>
             <a:pPr marL="0" lvl="0" indent="0" algn="just" rtl="0">
@@ -21325,7 +21325,7 @@
               <a:buSzPts val="1800"/>
               <a:buNone/>
             </a:pPr>
-            <a:endParaRPr sz="1800"/>
+            <a:endParaRPr sz="1800" dirty="0"/>
           </a:p>
           <a:p>
             <a:pPr marL="0" lvl="0" indent="0" algn="just" rtl="0">
@@ -21345,18 +21345,18 @@
               <a:buNone/>
             </a:pPr>
             <a:r>
-              <a:rPr lang="pt-BR" sz="1800"/>
+              <a:rPr lang="pt-BR" sz="1800" dirty="0"/>
               <a:t>Esse diagrama é muito utilizado na </a:t>
             </a:r>
             <a:r>
-              <a:rPr lang="pt-BR" sz="1800" b="1"/>
+              <a:rPr lang="pt-BR" sz="1800" b="1" dirty="0"/>
               <a:t>fase de análise de requisitos</a:t>
             </a:r>
             <a:r>
-              <a:rPr lang="pt-BR" sz="1800"/>
+              <a:rPr lang="pt-BR" sz="1800" dirty="0"/>
               <a:t>, pois ajuda a entender as necessidades do usuário, definir o escopo do sistema e melhorar a comunicação entre clientes, analistas e desenvolvedores.</a:t>
             </a:r>
-            <a:endParaRPr/>
+            <a:endParaRPr dirty="0"/>
           </a:p>
           <a:p>
             <a:pPr marL="0" lvl="0" indent="0" algn="just" rtl="0">
@@ -21375,7 +21375,7 @@
               <a:buSzPts val="2000"/>
               <a:buNone/>
             </a:pPr>
-            <a:endParaRPr/>
+            <a:endParaRPr dirty="0"/>
           </a:p>
         </p:txBody>
       </p:sp>

--- a/Projeto de Software e Segurança da Informação - 2026/Projeto de Software/Aula08-Diagrama UML/Diagrama de Uso.pptx
+++ b/Projeto de Software e Segurança da Informação - 2026/Projeto de Software/Aula08-Diagrama UML/Diagrama de Uso.pptx
@@ -22280,6 +22280,76 @@
           </a:p>
         </p:txBody>
       </p:sp>
+      <p:cxnSp>
+        <p:nvCxnSpPr>
+          <p:cNvPr id="5" name="Conector de Seta Reta 4">
+            <a:extLst>
+              <a:ext uri="{FF2B5EF4-FFF2-40B4-BE49-F238E27FC236}">
+                <a16:creationId xmlns:a16="http://schemas.microsoft.com/office/drawing/2014/main" id="{FC8F6D56-0F27-4F2A-B4E6-4C8305736E53}"/>
+              </a:ext>
+            </a:extLst>
+          </p:cNvPr>
+          <p:cNvCxnSpPr>
+            <a:stCxn id="127" idx="2"/>
+            <a:endCxn id="122" idx="6"/>
+          </p:cNvCxnSpPr>
+          <p:nvPr/>
+        </p:nvCxnSpPr>
+        <p:spPr>
+          <a:xfrm flipH="1" flipV="1">
+            <a:off x="4847843" y="2786080"/>
+            <a:ext cx="1966570" cy="689903"/>
+          </a:xfrm>
+          <a:prstGeom prst="straightConnector1">
+            <a:avLst/>
+          </a:prstGeom>
+          <a:noFill/>
+          <a:ln w="38100" cap="flat" cmpd="sng">
+            <a:solidFill>
+              <a:schemeClr val="dk1"/>
+            </a:solidFill>
+            <a:prstDash val="solid"/>
+            <a:miter lim="800000"/>
+            <a:headEnd type="none" w="sm" len="sm"/>
+            <a:tailEnd type="triangle" w="med" len="med"/>
+          </a:ln>
+        </p:spPr>
+      </p:cxnSp>
+      <p:cxnSp>
+        <p:nvCxnSpPr>
+          <p:cNvPr id="7" name="Conector de Seta Reta 6">
+            <a:extLst>
+              <a:ext uri="{FF2B5EF4-FFF2-40B4-BE49-F238E27FC236}">
+                <a16:creationId xmlns:a16="http://schemas.microsoft.com/office/drawing/2014/main" id="{696314F2-2D87-4C53-8A72-344E0ED37821}"/>
+              </a:ext>
+            </a:extLst>
+          </p:cNvPr>
+          <p:cNvCxnSpPr>
+            <a:stCxn id="127" idx="4"/>
+            <a:endCxn id="128" idx="0"/>
+          </p:cNvCxnSpPr>
+          <p:nvPr/>
+        </p:nvCxnSpPr>
+        <p:spPr>
+          <a:xfrm>
+            <a:off x="7692237" y="3993065"/>
+            <a:ext cx="0" cy="345431"/>
+          </a:xfrm>
+          <a:prstGeom prst="straightConnector1">
+            <a:avLst/>
+          </a:prstGeom>
+          <a:noFill/>
+          <a:ln w="38100" cap="flat" cmpd="sng">
+            <a:solidFill>
+              <a:schemeClr val="dk1"/>
+            </a:solidFill>
+            <a:prstDash val="solid"/>
+            <a:miter lim="800000"/>
+            <a:headEnd type="none" w="sm" len="sm"/>
+            <a:tailEnd type="triangle" w="med" len="med"/>
+          </a:ln>
+        </p:spPr>
+      </p:cxnSp>
     </p:spTree>
   </p:cSld>
   <p:clrMapOvr>
